--- a/assets/decks/Module_12_The_Professional_Kitchen.pptx
+++ b/assets/decks/Module_12_The_Professional_Kitchen.pptx
@@ -8417,6 +8417,7 @@
                   <a:srgbClr val="C0392B"/>
                 </a:solidFill>
                 <a:latin typeface="Calibri"/>
+                <a:hlinkClick r:id="rId2"/>
               </a:rPr>
               <a:t>Brian Lagerstrom (ex-restaurant pro, approachable)</a:t>
             </a:r>
@@ -8459,6 +8460,7 @@
                   <a:srgbClr val="B5651D"/>
                 </a:solidFill>
                 <a:latin typeface="Calibri"/>
+                <a:hlinkClick r:id="rId2"/>
               </a:rPr>
               <a:t>https://www.youtube.com/@BrianLagerstrom</a:t>
             </a:r>
@@ -8635,6 +8637,7 @@
                   <a:srgbClr val="C0392B"/>
                 </a:solidFill>
                 <a:latin typeface="Calibri"/>
+                <a:hlinkClick r:id="rId3"/>
               </a:rPr>
               <a:t>ChefSteps (modern technique &amp; sous vide)</a:t>
             </a:r>
@@ -8677,6 +8680,7 @@
                   <a:srgbClr val="B5651D"/>
                 </a:solidFill>
                 <a:latin typeface="Calibri"/>
+                <a:hlinkClick r:id="rId3"/>
               </a:rPr>
               <a:t>https://www.youtube.com/channel/UCxD2E-bVoUbaVFL0Q3PvJTg</a:t>
             </a:r>
@@ -8853,6 +8857,7 @@
                   <a:srgbClr val="C0392B"/>
                 </a:solidFill>
                 <a:latin typeface="Calibri"/>
+                <a:hlinkClick r:id="rId4"/>
               </a:rPr>
               <a:t>Pro Home Cooks (skill-building series)</a:t>
             </a:r>
@@ -8895,6 +8900,7 @@
                   <a:srgbClr val="B5651D"/>
                 </a:solidFill>
                 <a:latin typeface="Calibri"/>
+                <a:hlinkClick r:id="rId4"/>
               </a:rPr>
               <a:t>https://www.youtube.com/@ProHomeCooks</a:t>
             </a:r>
